--- a/courseware/DSA_CH03_Stack_Queue.pptx
+++ b/courseware/DSA_CH03_Stack_Queue.pptx
@@ -3336,7 +3336,7 @@
                 <a:latin typeface="Segoe UI"/>
                 <a:ea typeface="微软雅黑"/>
               </a:rPr>
-              <a:t>现代化重制版讲义　代码按 C++17 重写，全部可编译、可运行</a:t>
+              <a:t>现代化重制版讲义　代码按 C++17 重写；code/ 全部单元双档编译运行通过</a:t>
             </a:r>
           </a:p>
         </p:txBody>
@@ -19858,7 +19858,7 @@
                 <a:latin typeface="Segoe UI"/>
                 <a:ea typeface="微软雅黑"/>
               </a:rPr>
-              <a:t>习题（完整题面与参考答案见同名讲义）</a:t>
+              <a:t>习题选讲</a:t>
             </a:r>
           </a:p>
         </p:txBody>
@@ -19937,11 +19937,11 @@
                 <a:spcPts val="0"/>
               </a:spcBef>
               <a:spcAft>
-                <a:spcPts val="1240"/>
-              </a:spcAft>
-            </a:pPr>
-            <a:r>
-              <a:rPr sz="2000" b="0" i="0">
+                <a:spcPts val="1178"/>
+              </a:spcAft>
+            </a:pPr>
+            <a:r>
+              <a:rPr sz="1900" b="0" i="0">
                 <a:solidFill>
                   <a:srgbClr val="242A33"/>
                 </a:solidFill>
@@ -19951,7 +19951,7 @@
               <a:t>•  </a:t>
             </a:r>
             <a:r>
-              <a:rPr sz="2000" b="1" i="0">
+              <a:rPr sz="1900" b="1" i="0">
                 <a:solidFill>
                   <a:srgbClr val="12395B"/>
                 </a:solidFill>
@@ -19961,7 +19961,7 @@
               <a:t>补充 1</a:t>
             </a:r>
             <a:r>
-              <a:rPr sz="2000" b="0" i="0">
+              <a:rPr sz="1900" b="0" i="0">
                 <a:solidFill>
                   <a:srgbClr val="242A33"/>
                 </a:solidFill>
@@ -19971,7 +19971,7 @@
               <a:t>　只用两个栈的 push / pop / empty 实现队列，</a:t>
             </a:r>
             <a:r>
-              <a:rPr sz="2000" b="1" i="0">
+              <a:rPr sz="1900" b="1" i="0">
                 <a:solidFill>
                   <a:srgbClr val="12395B"/>
                 </a:solidFill>
@@ -19990,11 +19990,11 @@
                 <a:spcPts val="0"/>
               </a:spcBef>
               <a:spcAft>
-                <a:spcPts val="1240"/>
-              </a:spcAft>
-            </a:pPr>
-            <a:r>
-              <a:rPr sz="2000" b="0" i="0">
+                <a:spcPts val="1178"/>
+              </a:spcAft>
+            </a:pPr>
+            <a:r>
+              <a:rPr sz="1900" b="0" i="0">
                 <a:solidFill>
                   <a:srgbClr val="242A33"/>
                 </a:solidFill>
@@ -20004,7 +20004,7 @@
               <a:t>•  </a:t>
             </a:r>
             <a:r>
-              <a:rPr sz="2000" b="1" i="0">
+              <a:rPr sz="1900" b="1" i="0">
                 <a:solidFill>
                   <a:srgbClr val="12395B"/>
                 </a:solidFill>
@@ -20014,7 +20014,7 @@
               <a:t>补充 2</a:t>
             </a:r>
             <a:r>
-              <a:rPr sz="2000" b="0" i="0">
+              <a:rPr sz="1900" b="0" i="0">
                 <a:solidFill>
                   <a:srgbClr val="242A33"/>
                 </a:solidFill>
@@ -20024,7 +20024,7 @@
               <a:t>　</a:t>
             </a:r>
             <a:r>
-              <a:rPr sz="1879" b="0" i="0">
+              <a:rPr sz="1786" b="0" i="0">
                 <a:solidFill>
                   <a:srgbClr val="242A33"/>
                 </a:solidFill>
@@ -20034,7 +20034,7 @@
               <a:t>1..n</a:t>
             </a:r>
             <a:r>
-              <a:rPr sz="2000" b="0" i="0">
+              <a:rPr sz="1900" b="0" i="0">
                 <a:solidFill>
                   <a:srgbClr val="242A33"/>
                 </a:solidFill>
@@ -20044,7 +20044,7 @@
               <a:t> 依次进栈，求合法出栈序列的数量，</a:t>
             </a:r>
             <a:r>
-              <a:rPr sz="2000" b="1" i="0">
+              <a:rPr sz="1900" b="1" i="0">
                 <a:solidFill>
                   <a:srgbClr val="12395B"/>
                 </a:solidFill>
@@ -20063,11 +20063,11 @@
                 <a:spcPts val="0"/>
               </a:spcBef>
               <a:spcAft>
-                <a:spcPts val="1240"/>
-              </a:spcAft>
-            </a:pPr>
-            <a:r>
-              <a:rPr sz="2000" b="0" i="0">
+                <a:spcPts val="1178"/>
+              </a:spcAft>
+            </a:pPr>
+            <a:r>
+              <a:rPr sz="1900" b="0" i="0">
                 <a:solidFill>
                   <a:srgbClr val="242A33"/>
                 </a:solidFill>
@@ -20077,7 +20077,7 @@
               <a:t>•  </a:t>
             </a:r>
             <a:r>
-              <a:rPr sz="2000" b="1" i="0">
+              <a:rPr sz="1900" b="1" i="0">
                 <a:solidFill>
                   <a:srgbClr val="12395B"/>
                 </a:solidFill>
@@ -20087,7 +20087,7 @@
               <a:t>习题 6</a:t>
             </a:r>
             <a:r>
-              <a:rPr sz="2000" b="0" i="0">
+              <a:rPr sz="1900" b="0" i="0">
                 <a:solidFill>
                   <a:srgbClr val="242A33"/>
                 </a:solidFill>
@@ -20097,7 +20097,7 @@
               <a:t>　在长度 n 的数组里实现两个栈，</a:t>
             </a:r>
             <a:r>
-              <a:rPr sz="2000" b="1" i="0">
+              <a:rPr sz="1900" b="1" i="0">
                 <a:solidFill>
                   <a:srgbClr val="12395B"/>
                 </a:solidFill>
@@ -20107,7 +20107,7 @@
               <a:t>总数不到 n 就不许溢出</a:t>
             </a:r>
             <a:r>
-              <a:rPr sz="2000" b="0" i="0">
+              <a:rPr sz="1900" b="0" i="0">
                 <a:solidFill>
                   <a:srgbClr val="242A33"/>
                 </a:solidFill>
@@ -20126,11 +20126,11 @@
                 <a:spcPts val="0"/>
               </a:spcBef>
               <a:spcAft>
-                <a:spcPts val="1240"/>
-              </a:spcAft>
-            </a:pPr>
-            <a:r>
-              <a:rPr sz="2000" b="0" i="0">
+                <a:spcPts val="1178"/>
+              </a:spcAft>
+            </a:pPr>
+            <a:r>
+              <a:rPr sz="1900" b="0" i="0">
                 <a:solidFill>
                   <a:srgbClr val="242A33"/>
                 </a:solidFill>
@@ -20140,7 +20140,7 @@
               <a:t>•  </a:t>
             </a:r>
             <a:r>
-              <a:rPr sz="2000" b="1" i="0">
+              <a:rPr sz="1900" b="1" i="0">
                 <a:solidFill>
                   <a:srgbClr val="12395B"/>
                 </a:solidFill>
@@ -20150,7 +20150,7 @@
               <a:t>习题 8</a:t>
             </a:r>
             <a:r>
-              <a:rPr sz="2000" b="0" i="0">
+              <a:rPr sz="1900" b="0" i="0">
                 <a:solidFill>
                   <a:srgbClr val="242A33"/>
                 </a:solidFill>
@@ -20160,7 +20160,7 @@
               <a:t>　证明：能用一个栈得到排列 </a:t>
             </a:r>
             <a:r>
-              <a:rPr sz="1879" b="0" i="0">
+              <a:rPr sz="1786" b="0" i="0">
                 <a:solidFill>
                   <a:srgbClr val="242A33"/>
                 </a:solidFill>
@@ -20170,7 +20170,7 @@
               <a:t>p</a:t>
             </a:r>
             <a:r>
-              <a:rPr sz="2000" b="0" i="0">
+              <a:rPr sz="1900" b="0" i="0">
                 <a:solidFill>
                   <a:srgbClr val="242A33"/>
                 </a:solidFill>
@@ -20180,7 +20180,7 @@
               <a:t> 的</a:t>
             </a:r>
             <a:r>
-              <a:rPr sz="2000" b="1" i="0">
+              <a:rPr sz="1900" b="1" i="0">
                 <a:solidFill>
                   <a:srgbClr val="12395B"/>
                 </a:solidFill>
@@ -20190,7 +20190,7 @@
               <a:t>充要条件</a:t>
             </a:r>
             <a:r>
-              <a:rPr sz="2000" b="0" i="0">
+              <a:rPr sz="1900" b="0" i="0">
                 <a:solidFill>
                   <a:srgbClr val="242A33"/>
                 </a:solidFill>
@@ -20200,7 +20200,7 @@
               <a:t>是 —— 不存在 </a:t>
             </a:r>
             <a:r>
-              <a:rPr sz="1879" b="0" i="0">
+              <a:rPr sz="1786" b="0" i="0">
                 <a:solidFill>
                   <a:srgbClr val="242A33"/>
                 </a:solidFill>
@@ -20210,7 +20210,7 @@
               <a:t>i&lt;j&lt;k</a:t>
             </a:r>
             <a:r>
-              <a:rPr sz="2000" b="0" i="0">
+              <a:rPr sz="1900" b="0" i="0">
                 <a:solidFill>
                   <a:srgbClr val="242A33"/>
                 </a:solidFill>
@@ -20220,7 +20220,7 @@
               <a:t> 使 </a:t>
             </a:r>
             <a:r>
-              <a:rPr sz="1879" b="0" i="0">
+              <a:rPr sz="1786" b="0" i="0">
                 <a:solidFill>
                   <a:srgbClr val="242A33"/>
                 </a:solidFill>
@@ -20239,11 +20239,11 @@
                 <a:spcPts val="0"/>
               </a:spcBef>
               <a:spcAft>
-                <a:spcPts val="1240"/>
-              </a:spcAft>
-            </a:pPr>
-            <a:r>
-              <a:rPr sz="2000" b="0" i="0">
+                <a:spcPts val="1178"/>
+              </a:spcAft>
+            </a:pPr>
+            <a:r>
+              <a:rPr sz="1900" b="0" i="0">
                 <a:solidFill>
                   <a:srgbClr val="242A33"/>
                 </a:solidFill>
@@ -20253,7 +20253,7 @@
               <a:t>•  </a:t>
             </a:r>
             <a:r>
-              <a:rPr sz="2000" b="1" i="0">
+              <a:rPr sz="1900" b="1" i="0">
                 <a:solidFill>
                   <a:srgbClr val="12395B"/>
                 </a:solidFill>
@@ -20263,7 +20263,7 @@
               <a:t>习题 9 / 10</a:t>
             </a:r>
             <a:r>
-              <a:rPr sz="2000" b="0" i="0">
+              <a:rPr sz="1900" b="0" i="0">
                 <a:solidFill>
                   <a:srgbClr val="242A33"/>
                 </a:solidFill>
@@ -20273,7 +20273,7 @@
               <a:t>　用栈算后缀 </a:t>
             </a:r>
             <a:r>
-              <a:rPr sz="1879" b="0" i="0">
+              <a:rPr sz="1786" b="0" i="0">
                 <a:solidFill>
                   <a:srgbClr val="242A33"/>
                 </a:solidFill>
@@ -20283,7 +20283,7 @@
               <a:t>12 8 9 * +</a:t>
             </a:r>
             <a:r>
-              <a:rPr sz="2000" b="0" i="0">
+              <a:rPr sz="1900" b="0" i="0">
                 <a:solidFill>
                   <a:srgbClr val="242A33"/>
                 </a:solidFill>
@@ -20293,7 +20293,7 @@
               <a:t>；用栈把中缀 </a:t>
             </a:r>
             <a:r>
-              <a:rPr sz="1879" b="0" i="0">
+              <a:rPr sz="1786" b="0" i="0">
                 <a:solidFill>
                   <a:srgbClr val="242A33"/>
                 </a:solidFill>
@@ -20303,7 +20303,7 @@
               <a:t>a*(b*c-d)+e</a:t>
             </a:r>
             <a:r>
-              <a:rPr sz="2000" b="0" i="0">
+              <a:rPr sz="1900" b="0" i="0">
                 <a:solidFill>
                   <a:srgbClr val="242A33"/>
                 </a:solidFill>
@@ -20322,11 +20322,11 @@
                 <a:spcPts val="0"/>
               </a:spcBef>
               <a:spcAft>
-                <a:spcPts val="1240"/>
-              </a:spcAft>
-            </a:pPr>
-            <a:r>
-              <a:rPr sz="2000" b="0" i="0">
+                <a:spcPts val="1178"/>
+              </a:spcAft>
+            </a:pPr>
+            <a:r>
+              <a:rPr sz="1900" b="0" i="0">
                 <a:solidFill>
                   <a:srgbClr val="242A33"/>
                 </a:solidFill>
@@ -20336,7 +20336,7 @@
               <a:t>•  </a:t>
             </a:r>
             <a:r>
-              <a:rPr sz="2000" b="1" i="0">
+              <a:rPr sz="1900" b="1" i="0">
                 <a:solidFill>
                   <a:srgbClr val="12395B"/>
                 </a:solidFill>
@@ -20346,7 +20346,7 @@
               <a:t>上机 5</a:t>
             </a:r>
             <a:r>
-              <a:rPr sz="2000" b="0" i="0">
+              <a:rPr sz="1900" b="0" i="0">
                 <a:solidFill>
                   <a:srgbClr val="242A33"/>
                 </a:solidFill>
@@ -20365,11 +20365,11 @@
                 <a:spcPts val="0"/>
               </a:spcBef>
               <a:spcAft>
-                <a:spcPts val="1240"/>
-              </a:spcAft>
-            </a:pPr>
-            <a:r>
-              <a:rPr sz="2000" b="0" i="0">
+                <a:spcPts val="1178"/>
+              </a:spcAft>
+            </a:pPr>
+            <a:r>
+              <a:rPr sz="1900" b="0" i="0">
                 <a:solidFill>
                   <a:srgbClr val="242A33"/>
                 </a:solidFill>
@@ -20379,7 +20379,7 @@
               <a:t>•  </a:t>
             </a:r>
             <a:r>
-              <a:rPr sz="2000" b="1" i="0">
+              <a:rPr sz="1900" b="1" i="0">
                 <a:solidFill>
                   <a:srgbClr val="12395B"/>
                 </a:solidFill>
@@ -20389,7 +20389,7 @@
               <a:t>上机 6</a:t>
             </a:r>
             <a:r>
-              <a:rPr sz="2000" b="0" i="0">
+              <a:rPr sz="1900" b="0" i="0">
                 <a:solidFill>
                   <a:srgbClr val="242A33"/>
                 </a:solidFill>
@@ -20399,7 +20399,7 @@
               <a:t>　Ackermann 函数：写出 </a:t>
             </a:r>
             <a:r>
-              <a:rPr sz="1879" b="0" i="0">
+              <a:rPr sz="1786" b="0" i="0">
                 <a:solidFill>
                   <a:srgbClr val="242A33"/>
                 </a:solidFill>
@@ -20409,7 +20409,7 @@
               <a:t>Ack(2,1)</a:t>
             </a:r>
             <a:r>
-              <a:rPr sz="2000" b="0" i="0">
+              <a:rPr sz="1900" b="0" i="0">
                 <a:solidFill>
                   <a:srgbClr val="242A33"/>
                 </a:solidFill>
@@ -20417,6 +20417,79 @@
                 <a:ea typeface="微软雅黑"/>
               </a:rPr>
               <a:t> 的计算过程，再写非递归算法</a:t>
+            </a:r>
+          </a:p>
+          <a:p>
+            <a:pPr algn="l">
+              <a:lnSpc>
+                <a:spcPct val="132000"/>
+              </a:lnSpc>
+              <a:spcBef>
+                <a:spcPts val="0"/>
+              </a:spcBef>
+              <a:spcAft>
+                <a:spcPts val="1178"/>
+              </a:spcAft>
+            </a:pPr>
+            <a:r>
+              <a:rPr sz="1900" b="0" i="0">
+                <a:solidFill>
+                  <a:srgbClr val="242A33"/>
+                </a:solidFill>
+                <a:latin typeface="Segoe UI"/>
+                <a:ea typeface="微软雅黑"/>
+              </a:rPr>
+              <a:t>•  </a:t>
+            </a:r>
+            <a:r>
+              <a:rPr sz="1900" b="1" i="0">
+                <a:solidFill>
+                  <a:srgbClr val="12395B"/>
+                </a:solidFill>
+                <a:latin typeface="Segoe UI"/>
+                <a:ea typeface="微软雅黑"/>
+              </a:rPr>
+              <a:t>这一页和讲义里都是选讲。</a:t>
+            </a:r>
+            <a:r>
+              <a:rPr sz="1900" b="0" i="0">
+                <a:solidFill>
+                  <a:srgbClr val="242A33"/>
+                </a:solidFill>
+                <a:latin typeface="Segoe UI"/>
+                <a:ea typeface="微软雅黑"/>
+              </a:rPr>
+              <a:t> 原书全部 </a:t>
+            </a:r>
+            <a:r>
+              <a:rPr sz="1900" b="1" i="0">
+                <a:solidFill>
+                  <a:srgbClr val="12395B"/>
+                </a:solidFill>
+                <a:latin typeface="Segoe UI"/>
+                <a:ea typeface="微软雅黑"/>
+              </a:rPr>
+              <a:t>345 道</a:t>
+            </a:r>
+            <a:r>
+              <a:rPr sz="1900" b="0" i="0">
+                <a:solidFill>
+                  <a:srgbClr val="242A33"/>
+                </a:solidFill>
+                <a:latin typeface="Segoe UI"/>
+                <a:ea typeface="微软雅黑"/>
+              </a:rPr>
+              <a:t>习题与上机题的参考答案，在 </a:t>
+            </a:r>
+            <a:r>
+              <a:rPr sz="1786" b="0" i="0">
+                <a:solidFill>
+                  <a:srgbClr val="242A33"/>
+                </a:solidFill>
+                <a:latin typeface="Consolas"/>
+                <a:ea typeface="Consolas"/>
+              </a:rPr>
+              <a:t>book/习题与参考答案.md</a:t>
             </a:r>
           </a:p>
         </p:txBody>
